--- a/outputs/ppt/Iris_Flower_Species_Classification.pptx
+++ b/outputs/ppt/Iris_Flower_Species_Classification.pptx
@@ -3183,7 +3183,7 @@
                 <a:latin typeface="Calibri"/>
               </a:rPr>
               <a:t>Name: ____________________
-Date: 2026-04-10</a:t>
+Date: 2026-10-30</a:t>
             </a:r>
           </a:p>
         </p:txBody>
